--- a/resources/pics.pptx
+++ b/resources/pics.pptx
@@ -7,6 +7,7 @@
   <p:sldIdLst>
     <p:sldId id="256" r:id="rId2"/>
     <p:sldId id="257" r:id="rId3"/>
+    <p:sldId id="258" r:id="rId4"/>
   </p:sldIdLst>
   <p:sldSz cx="12192000" cy="6858000"/>
   <p:notesSz cx="6858000" cy="9144000"/>
@@ -105,6 +106,11 @@
       </a:defRPr>
     </a:lvl9pPr>
   </p:defaultTextStyle>
+  <p:extLst>
+    <p:ext uri="{EFAFB233-063F-42B5-8137-9DF3F51BA10A}">
+      <p15:sldGuideLst xmlns:p15="http://schemas.microsoft.com/office/powerpoint/2012/main"/>
+    </p:ext>
+  </p:extLst>
 </p:presentation>
 </file>
 
@@ -255,7 +261,7 @@
           <a:p>
             <a:fld id="{0E9CB6BF-AFFF-4E3C-966A-070A7F7C29DD}" type="datetimeFigureOut">
               <a:rPr lang="de-DE" smtClean="0"/>
-              <a:t>14.07.2026</a:t>
+              <a:t>23.07.2026</a:t>
             </a:fld>
             <a:endParaRPr lang="de-DE"/>
           </a:p>
@@ -453,7 +459,7 @@
           <a:p>
             <a:fld id="{0E9CB6BF-AFFF-4E3C-966A-070A7F7C29DD}" type="datetimeFigureOut">
               <a:rPr lang="de-DE" smtClean="0"/>
-              <a:t>14.07.2026</a:t>
+              <a:t>23.07.2026</a:t>
             </a:fld>
             <a:endParaRPr lang="de-DE"/>
           </a:p>
@@ -661,7 +667,7 @@
           <a:p>
             <a:fld id="{0E9CB6BF-AFFF-4E3C-966A-070A7F7C29DD}" type="datetimeFigureOut">
               <a:rPr lang="de-DE" smtClean="0"/>
-              <a:t>14.07.2026</a:t>
+              <a:t>23.07.2026</a:t>
             </a:fld>
             <a:endParaRPr lang="de-DE"/>
           </a:p>
@@ -859,7 +865,7 @@
           <a:p>
             <a:fld id="{0E9CB6BF-AFFF-4E3C-966A-070A7F7C29DD}" type="datetimeFigureOut">
               <a:rPr lang="de-DE" smtClean="0"/>
-              <a:t>14.07.2026</a:t>
+              <a:t>23.07.2026</a:t>
             </a:fld>
             <a:endParaRPr lang="de-DE"/>
           </a:p>
@@ -1134,7 +1140,7 @@
           <a:p>
             <a:fld id="{0E9CB6BF-AFFF-4E3C-966A-070A7F7C29DD}" type="datetimeFigureOut">
               <a:rPr lang="de-DE" smtClean="0"/>
-              <a:t>14.07.2026</a:t>
+              <a:t>23.07.2026</a:t>
             </a:fld>
             <a:endParaRPr lang="de-DE"/>
           </a:p>
@@ -1399,7 +1405,7 @@
           <a:p>
             <a:fld id="{0E9CB6BF-AFFF-4E3C-966A-070A7F7C29DD}" type="datetimeFigureOut">
               <a:rPr lang="de-DE" smtClean="0"/>
-              <a:t>14.07.2026</a:t>
+              <a:t>23.07.2026</a:t>
             </a:fld>
             <a:endParaRPr lang="de-DE"/>
           </a:p>
@@ -1811,7 +1817,7 @@
           <a:p>
             <a:fld id="{0E9CB6BF-AFFF-4E3C-966A-070A7F7C29DD}" type="datetimeFigureOut">
               <a:rPr lang="de-DE" smtClean="0"/>
-              <a:t>14.07.2026</a:t>
+              <a:t>23.07.2026</a:t>
             </a:fld>
             <a:endParaRPr lang="de-DE"/>
           </a:p>
@@ -1952,7 +1958,7 @@
           <a:p>
             <a:fld id="{0E9CB6BF-AFFF-4E3C-966A-070A7F7C29DD}" type="datetimeFigureOut">
               <a:rPr lang="de-DE" smtClean="0"/>
-              <a:t>14.07.2026</a:t>
+              <a:t>23.07.2026</a:t>
             </a:fld>
             <a:endParaRPr lang="de-DE"/>
           </a:p>
@@ -2065,7 +2071,7 @@
           <a:p>
             <a:fld id="{0E9CB6BF-AFFF-4E3C-966A-070A7F7C29DD}" type="datetimeFigureOut">
               <a:rPr lang="de-DE" smtClean="0"/>
-              <a:t>14.07.2026</a:t>
+              <a:t>23.07.2026</a:t>
             </a:fld>
             <a:endParaRPr lang="de-DE"/>
           </a:p>
@@ -2376,7 +2382,7 @@
           <a:p>
             <a:fld id="{0E9CB6BF-AFFF-4E3C-966A-070A7F7C29DD}" type="datetimeFigureOut">
               <a:rPr lang="de-DE" smtClean="0"/>
-              <a:t>14.07.2026</a:t>
+              <a:t>23.07.2026</a:t>
             </a:fld>
             <a:endParaRPr lang="de-DE"/>
           </a:p>
@@ -2664,7 +2670,7 @@
           <a:p>
             <a:fld id="{0E9CB6BF-AFFF-4E3C-966A-070A7F7C29DD}" type="datetimeFigureOut">
               <a:rPr lang="de-DE" smtClean="0"/>
-              <a:t>14.07.2026</a:t>
+              <a:t>23.07.2026</a:t>
             </a:fld>
             <a:endParaRPr lang="de-DE"/>
           </a:p>
@@ -2905,7 +2911,7 @@
           <a:p>
             <a:fld id="{0E9CB6BF-AFFF-4E3C-966A-070A7F7C29DD}" type="datetimeFigureOut">
               <a:rPr lang="de-DE" smtClean="0"/>
-              <a:t>14.07.2026</a:t>
+              <a:t>23.07.2026</a:t>
             </a:fld>
             <a:endParaRPr lang="de-DE"/>
           </a:p>
@@ -3324,10 +3330,10 @@
       </p:grpSpPr>
       <p:grpSp>
         <p:nvGrpSpPr>
-          <p:cNvPr id="23" name="Gruppieren 22">
-            <a:extLst>
-              <a:ext uri="{FF2B5EF4-FFF2-40B4-BE49-F238E27FC236}">
-                <a16:creationId xmlns:a16="http://schemas.microsoft.com/office/drawing/2014/main" id="{FF46ABEA-9718-90CA-0340-14BAFD5BBE22}"/>
+          <p:cNvPr id="17" name="Gruppieren 16">
+            <a:extLst>
+              <a:ext uri="{FF2B5EF4-FFF2-40B4-BE49-F238E27FC236}">
+                <a16:creationId xmlns:a16="http://schemas.microsoft.com/office/drawing/2014/main" id="{656A6E47-C6B2-EC86-BC4E-C74C5155F7E4}"/>
               </a:ext>
             </a:extLst>
           </p:cNvPr>
@@ -3336,331 +3342,408 @@
         </p:nvGrpSpPr>
         <p:grpSpPr>
           <a:xfrm>
-            <a:off x="1457741" y="1299888"/>
-            <a:ext cx="6650154" cy="1440000"/>
-            <a:chOff x="1457740" y="1299888"/>
-            <a:chExt cx="8216941" cy="1440000"/>
+            <a:off x="1457741" y="1299887"/>
+            <a:ext cx="6650154" cy="1548001"/>
+            <a:chOff x="1457741" y="1299887"/>
+            <a:chExt cx="6650154" cy="1548001"/>
           </a:xfrm>
         </p:grpSpPr>
-        <p:sp>
-          <p:nvSpPr>
-            <p:cNvPr id="6" name="Rechteck 5">
+        <p:grpSp>
+          <p:nvGrpSpPr>
+            <p:cNvPr id="23" name="Gruppieren 22">
               <a:extLst>
                 <a:ext uri="{FF2B5EF4-FFF2-40B4-BE49-F238E27FC236}">
-                  <a16:creationId xmlns:a16="http://schemas.microsoft.com/office/drawing/2014/main" id="{EB8E8321-C3F3-7554-93DB-9B7A001A00F1}"/>
+                  <a16:creationId xmlns:a16="http://schemas.microsoft.com/office/drawing/2014/main" id="{FF46ABEA-9718-90CA-0340-14BAFD5BBE22}"/>
                 </a:ext>
               </a:extLst>
             </p:cNvPr>
-            <p:cNvSpPr/>
+            <p:cNvGrpSpPr/>
             <p:nvPr/>
-          </p:nvSpPr>
+          </p:nvGrpSpPr>
+          <p:grpSpPr>
+            <a:xfrm>
+              <a:off x="1457741" y="1299887"/>
+              <a:ext cx="6650154" cy="1548001"/>
+              <a:chOff x="1457740" y="1299887"/>
+              <a:chExt cx="8216941" cy="1548001"/>
+            </a:xfrm>
+          </p:grpSpPr>
+          <p:sp>
+            <p:nvSpPr>
+              <p:cNvPr id="6" name="Rechteck 5">
+                <a:extLst>
+                  <a:ext uri="{FF2B5EF4-FFF2-40B4-BE49-F238E27FC236}">
+                    <a16:creationId xmlns:a16="http://schemas.microsoft.com/office/drawing/2014/main" id="{EB8E8321-C3F3-7554-93DB-9B7A001A00F1}"/>
+                  </a:ext>
+                </a:extLst>
+              </p:cNvPr>
+              <p:cNvSpPr/>
+              <p:nvPr/>
+            </p:nvSpPr>
+            <p:spPr>
+              <a:xfrm>
+                <a:off x="4543132" y="1299888"/>
+                <a:ext cx="2046156" cy="1548000"/>
+              </a:xfrm>
+              <a:prstGeom prst="rect">
+                <a:avLst/>
+              </a:prstGeom>
+            </p:spPr>
+            <p:style>
+              <a:lnRef idx="2">
+                <a:schemeClr val="dk1"/>
+              </a:lnRef>
+              <a:fillRef idx="1">
+                <a:schemeClr val="lt1"/>
+              </a:fillRef>
+              <a:effectRef idx="0">
+                <a:schemeClr val="dk1"/>
+              </a:effectRef>
+              <a:fontRef idx="minor">
+                <a:schemeClr val="dk1"/>
+              </a:fontRef>
+            </p:style>
+            <p:txBody>
+              <a:bodyPr rtlCol="0" anchor="ctr"/>
+              <a:lstStyle/>
+              <a:p>
+                <a:pPr algn="ctr"/>
+                <a:r>
+                  <a:rPr lang="de-DE" dirty="0" err="1"/>
+                  <a:t>Anonymization</a:t>
+                </a:r>
+                <a:r>
+                  <a:rPr lang="de-DE" dirty="0"/>
+                  <a:t> System</a:t>
+                </a:r>
+              </a:p>
+            </p:txBody>
+          </p:sp>
+          <p:sp>
+            <p:nvSpPr>
+              <p:cNvPr id="4" name="Rechteck 3">
+                <a:extLst>
+                  <a:ext uri="{FF2B5EF4-FFF2-40B4-BE49-F238E27FC236}">
+                    <a16:creationId xmlns:a16="http://schemas.microsoft.com/office/drawing/2014/main" id="{75700ADC-B32D-D91C-8BA3-C582BE09755C}"/>
+                  </a:ext>
+                </a:extLst>
+              </p:cNvPr>
+              <p:cNvSpPr/>
+              <p:nvPr/>
+            </p:nvSpPr>
+            <p:spPr>
+              <a:xfrm>
+                <a:off x="1457740" y="1299888"/>
+                <a:ext cx="2001675" cy="1548000"/>
+              </a:xfrm>
+              <a:prstGeom prst="rect">
+                <a:avLst/>
+              </a:prstGeom>
+              <a:solidFill>
+                <a:schemeClr val="bg1"/>
+              </a:solidFill>
+            </p:spPr>
+            <p:style>
+              <a:lnRef idx="2">
+                <a:schemeClr val="dk1"/>
+              </a:lnRef>
+              <a:fillRef idx="1">
+                <a:schemeClr val="lt1"/>
+              </a:fillRef>
+              <a:effectRef idx="0">
+                <a:schemeClr val="dk1"/>
+              </a:effectRef>
+              <a:fontRef idx="minor">
+                <a:schemeClr val="dk1"/>
+              </a:fontRef>
+            </p:style>
+            <p:txBody>
+              <a:bodyPr rtlCol="0" anchor="b"/>
+              <a:lstStyle/>
+              <a:p>
+                <a:pPr algn="ctr"/>
+                <a:r>
+                  <a:rPr lang="de-DE" dirty="0"/>
+                  <a:t>Main System</a:t>
+                </a:r>
+              </a:p>
+            </p:txBody>
+          </p:sp>
+          <p:sp>
+            <p:nvSpPr>
+              <p:cNvPr id="8" name="Rechteck 7">
+                <a:extLst>
+                  <a:ext uri="{FF2B5EF4-FFF2-40B4-BE49-F238E27FC236}">
+                    <a16:creationId xmlns:a16="http://schemas.microsoft.com/office/drawing/2014/main" id="{850BDE9C-C17B-CE24-9592-FAD2367F2241}"/>
+                  </a:ext>
+                </a:extLst>
+              </p:cNvPr>
+              <p:cNvSpPr/>
+              <p:nvPr/>
+            </p:nvSpPr>
+            <p:spPr>
+              <a:xfrm>
+                <a:off x="7673006" y="1299887"/>
+                <a:ext cx="2001675" cy="1548000"/>
+              </a:xfrm>
+              <a:prstGeom prst="rect">
+                <a:avLst/>
+              </a:prstGeom>
+            </p:spPr>
+            <p:style>
+              <a:lnRef idx="2">
+                <a:schemeClr val="dk1"/>
+              </a:lnRef>
+              <a:fillRef idx="1">
+                <a:schemeClr val="lt1"/>
+              </a:fillRef>
+              <a:effectRef idx="0">
+                <a:schemeClr val="dk1"/>
+              </a:effectRef>
+              <a:fontRef idx="minor">
+                <a:schemeClr val="dk1"/>
+              </a:fontRef>
+            </p:style>
+            <p:txBody>
+              <a:bodyPr rtlCol="0" anchor="b"/>
+              <a:lstStyle/>
+              <a:p>
+                <a:pPr algn="ctr"/>
+                <a:r>
+                  <a:rPr lang="de-DE" dirty="0"/>
+                  <a:t>Identity Management System</a:t>
+                </a:r>
+              </a:p>
+            </p:txBody>
+          </p:sp>
+          <p:cxnSp>
+            <p:nvCxnSpPr>
+              <p:cNvPr id="10" name="Gerader Verbinder 9">
+                <a:extLst>
+                  <a:ext uri="{FF2B5EF4-FFF2-40B4-BE49-F238E27FC236}">
+                    <a16:creationId xmlns:a16="http://schemas.microsoft.com/office/drawing/2014/main" id="{9983F88E-5427-7AE7-C1FA-B91313DB57DA}"/>
+                  </a:ext>
+                </a:extLst>
+              </p:cNvPr>
+              <p:cNvCxnSpPr>
+                <a:cxnSpLocks/>
+                <a:stCxn id="6" idx="3"/>
+                <a:endCxn id="8" idx="1"/>
+              </p:cNvCxnSpPr>
+              <p:nvPr/>
+            </p:nvCxnSpPr>
+            <p:spPr>
+              <a:xfrm flipV="1">
+                <a:off x="6589289" y="2073887"/>
+                <a:ext cx="1083718" cy="1"/>
+              </a:xfrm>
+              <a:prstGeom prst="line">
+                <a:avLst/>
+              </a:prstGeom>
+              <a:ln>
+                <a:headEnd type="arrow" w="med" len="med"/>
+                <a:tailEnd type="arrow" w="med" len="med"/>
+              </a:ln>
+            </p:spPr>
+            <p:style>
+              <a:lnRef idx="2">
+                <a:schemeClr val="dk1"/>
+              </a:lnRef>
+              <a:fillRef idx="0">
+                <a:schemeClr val="dk1"/>
+              </a:fillRef>
+              <a:effectRef idx="1">
+                <a:schemeClr val="dk1"/>
+              </a:effectRef>
+              <a:fontRef idx="minor">
+                <a:schemeClr val="tx1"/>
+              </a:fontRef>
+            </p:style>
+          </p:cxnSp>
+          <p:cxnSp>
+            <p:nvCxnSpPr>
+              <p:cNvPr id="11" name="Gerader Verbinder 10">
+                <a:extLst>
+                  <a:ext uri="{FF2B5EF4-FFF2-40B4-BE49-F238E27FC236}">
+                    <a16:creationId xmlns:a16="http://schemas.microsoft.com/office/drawing/2014/main" id="{AE25ADC1-A121-3C34-06E8-9A8763A33DB7}"/>
+                  </a:ext>
+                </a:extLst>
+              </p:cNvPr>
+              <p:cNvCxnSpPr>
+                <a:cxnSpLocks/>
+                <a:stCxn id="4" idx="3"/>
+                <a:endCxn id="6" idx="1"/>
+              </p:cNvCxnSpPr>
+              <p:nvPr/>
+            </p:nvCxnSpPr>
+            <p:spPr>
+              <a:xfrm>
+                <a:off x="3459415" y="2073888"/>
+                <a:ext cx="1083718" cy="0"/>
+              </a:xfrm>
+              <a:prstGeom prst="line">
+                <a:avLst/>
+              </a:prstGeom>
+              <a:ln>
+                <a:headEnd type="arrow" w="med" len="med"/>
+                <a:tailEnd type="arrow" w="med" len="med"/>
+              </a:ln>
+            </p:spPr>
+            <p:style>
+              <a:lnRef idx="2">
+                <a:schemeClr val="dk1"/>
+              </a:lnRef>
+              <a:fillRef idx="0">
+                <a:schemeClr val="dk1"/>
+              </a:fillRef>
+              <a:effectRef idx="1">
+                <a:schemeClr val="dk1"/>
+              </a:effectRef>
+              <a:fontRef idx="minor">
+                <a:schemeClr val="tx1"/>
+              </a:fontRef>
+            </p:style>
+          </p:cxnSp>
+          <p:sp>
+            <p:nvSpPr>
+              <p:cNvPr id="20" name="Textfeld 19">
+                <a:extLst>
+                  <a:ext uri="{FF2B5EF4-FFF2-40B4-BE49-F238E27FC236}">
+                    <a16:creationId xmlns:a16="http://schemas.microsoft.com/office/drawing/2014/main" id="{6B949113-B4CD-BA19-367F-80FCFEEF5FD7}"/>
+                  </a:ext>
+                </a:extLst>
+              </p:cNvPr>
+              <p:cNvSpPr txBox="1"/>
+              <p:nvPr/>
+            </p:nvSpPr>
+            <p:spPr>
+              <a:xfrm>
+                <a:off x="3545336" y="1659888"/>
+                <a:ext cx="889633" cy="360000"/>
+              </a:xfrm>
+              <a:prstGeom prst="rect">
+                <a:avLst/>
+              </a:prstGeom>
+              <a:noFill/>
+            </p:spPr>
+            <p:txBody>
+              <a:bodyPr wrap="square" rtlCol="0">
+                <a:spAutoFit/>
+              </a:bodyPr>
+              <a:lstStyle/>
+              <a:p>
+                <a:pPr algn="ctr"/>
+                <a:r>
+                  <a:rPr lang="de-DE" dirty="0"/>
+                  <a:t>HTTP</a:t>
+                </a:r>
+              </a:p>
+            </p:txBody>
+          </p:sp>
+          <p:sp>
+            <p:nvSpPr>
+              <p:cNvPr id="22" name="Textfeld 21">
+                <a:extLst>
+                  <a:ext uri="{FF2B5EF4-FFF2-40B4-BE49-F238E27FC236}">
+                    <a16:creationId xmlns:a16="http://schemas.microsoft.com/office/drawing/2014/main" id="{C8E7506E-3392-8EC8-326D-6D619AD948E3}"/>
+                  </a:ext>
+                </a:extLst>
+              </p:cNvPr>
+              <p:cNvSpPr txBox="1"/>
+              <p:nvPr/>
+            </p:nvSpPr>
+            <p:spPr>
+              <a:xfrm>
+                <a:off x="6675210" y="1659888"/>
+                <a:ext cx="889633" cy="360000"/>
+              </a:xfrm>
+              <a:prstGeom prst="rect">
+                <a:avLst/>
+              </a:prstGeom>
+              <a:noFill/>
+            </p:spPr>
+            <p:txBody>
+              <a:bodyPr wrap="square" rtlCol="0">
+                <a:spAutoFit/>
+              </a:bodyPr>
+              <a:lstStyle/>
+              <a:p>
+                <a:pPr algn="ctr"/>
+                <a:r>
+                  <a:rPr lang="de-DE" dirty="0"/>
+                  <a:t>HTTP</a:t>
+                </a:r>
+              </a:p>
+            </p:txBody>
+          </p:sp>
+        </p:grpSp>
+        <p:pic>
+          <p:nvPicPr>
+            <p:cNvPr id="2" name="Grafik 1" descr="https://lh3.googleusercontent.com/sitesv/AG8ngQXdRawZwyjFoMVXj4i_nR0Hhl0vOtUh4LXNMso98ilXe0rmkCYJuYILg22U_18YY7d4uGsGn3P6m6cFPv-ZbSjPBFCCKcDoHoFcvnMGOWBT_E7WOema_U1_ZOyQ4IbLwyOrSqOFS9gGbli8YS8wO3UcCZHvvZipQ2y-tIh22jA74_lhH4hVSmKSyUM1Sq4=w1280">
+              <a:extLst>
+                <a:ext uri="{FF2B5EF4-FFF2-40B4-BE49-F238E27FC236}">
+                  <a16:creationId xmlns:a16="http://schemas.microsoft.com/office/drawing/2014/main" id="{F5B6667C-758D-106E-9F03-5F1950DB09A5}"/>
+                </a:ext>
+              </a:extLst>
+            </p:cNvPr>
+            <p:cNvPicPr>
+              <a:picLocks noChangeAspect="1"/>
+            </p:cNvPicPr>
+            <p:nvPr/>
+          </p:nvPicPr>
+          <p:blipFill>
+            <a:blip r:embed="rId2"/>
+            <a:stretch>
+              <a:fillRect/>
+            </a:stretch>
+          </p:blipFill>
           <p:spPr>
             <a:xfrm>
-              <a:off x="4543132" y="1299888"/>
-              <a:ext cx="2046156" cy="1440000"/>
+              <a:off x="1638462" y="1326070"/>
+              <a:ext cx="1263480" cy="1263480"/>
             </a:xfrm>
             <a:prstGeom prst="rect">
               <a:avLst/>
             </a:prstGeom>
           </p:spPr>
-          <p:style>
-            <a:lnRef idx="2">
-              <a:schemeClr val="dk1"/>
-            </a:lnRef>
-            <a:fillRef idx="1">
-              <a:schemeClr val="lt1"/>
-            </a:fillRef>
-            <a:effectRef idx="0">
-              <a:schemeClr val="dk1"/>
-            </a:effectRef>
-            <a:fontRef idx="minor">
-              <a:schemeClr val="dk1"/>
-            </a:fontRef>
-          </p:style>
-          <p:txBody>
-            <a:bodyPr rtlCol="0" anchor="ctr"/>
-            <a:lstStyle/>
-            <a:p>
-              <a:pPr algn="ctr"/>
-              <a:r>
-                <a:rPr lang="de-DE" dirty="0" err="1"/>
-                <a:t>Anonymization</a:t>
-              </a:r>
-              <a:r>
-                <a:rPr lang="de-DE" dirty="0"/>
-                <a:t> System</a:t>
-              </a:r>
-            </a:p>
-          </p:txBody>
-        </p:sp>
-        <p:sp>
-          <p:nvSpPr>
-            <p:cNvPr id="4" name="Rechteck 3">
+        </p:pic>
+        <p:pic>
+          <p:nvPicPr>
+            <p:cNvPr id="5" name="Grafik 4">
               <a:extLst>
                 <a:ext uri="{FF2B5EF4-FFF2-40B4-BE49-F238E27FC236}">
-                  <a16:creationId xmlns:a16="http://schemas.microsoft.com/office/drawing/2014/main" id="{75700ADC-B32D-D91C-8BA3-C582BE09755C}"/>
+                  <a16:creationId xmlns:a16="http://schemas.microsoft.com/office/drawing/2014/main" id="{F718A493-C5C8-7669-16E8-765F53DFE44A}"/>
                 </a:ext>
               </a:extLst>
             </p:cNvPr>
-            <p:cNvSpPr/>
+            <p:cNvPicPr>
+              <a:picLocks noChangeAspect="1"/>
+            </p:cNvPicPr>
             <p:nvPr/>
-          </p:nvSpPr>
+          </p:nvPicPr>
+          <p:blipFill>
+            <a:blip r:embed="rId3">
+              <a:extLst>
+                <a:ext uri="{28A0092B-C50C-407E-A947-70E740481C1C}">
+                  <a14:useLocalDpi xmlns:a14="http://schemas.microsoft.com/office/drawing/2010/main" val="0"/>
+                </a:ext>
+              </a:extLst>
+            </a:blip>
+            <a:srcRect l="57390" t="18279" r="32043" b="78517"/>
+            <a:stretch>
+              <a:fillRect/>
+            </a:stretch>
+          </p:blipFill>
           <p:spPr>
             <a:xfrm>
-              <a:off x="1457740" y="1299888"/>
-              <a:ext cx="2001675" cy="1440000"/>
+              <a:off x="6538263" y="1361966"/>
+              <a:ext cx="1519264" cy="595844"/>
             </a:xfrm>
             <a:prstGeom prst="rect">
               <a:avLst/>
             </a:prstGeom>
           </p:spPr>
-          <p:style>
-            <a:lnRef idx="2">
-              <a:schemeClr val="dk1"/>
-            </a:lnRef>
-            <a:fillRef idx="1">
-              <a:schemeClr val="lt1"/>
-            </a:fillRef>
-            <a:effectRef idx="0">
-              <a:schemeClr val="dk1"/>
-            </a:effectRef>
-            <a:fontRef idx="minor">
-              <a:schemeClr val="dk1"/>
-            </a:fontRef>
-          </p:style>
-          <p:txBody>
-            <a:bodyPr rtlCol="0" anchor="ctr"/>
-            <a:lstStyle/>
-            <a:p>
-              <a:pPr algn="ctr"/>
-              <a:r>
-                <a:rPr lang="de-DE" dirty="0"/>
-                <a:t>Main System</a:t>
-              </a:r>
-            </a:p>
-          </p:txBody>
-        </p:sp>
-        <p:sp>
-          <p:nvSpPr>
-            <p:cNvPr id="8" name="Rechteck 7">
-              <a:extLst>
-                <a:ext uri="{FF2B5EF4-FFF2-40B4-BE49-F238E27FC236}">
-                  <a16:creationId xmlns:a16="http://schemas.microsoft.com/office/drawing/2014/main" id="{850BDE9C-C17B-CE24-9592-FAD2367F2241}"/>
-                </a:ext>
-              </a:extLst>
-            </p:cNvPr>
-            <p:cNvSpPr/>
-            <p:nvPr/>
-          </p:nvSpPr>
-          <p:spPr>
-            <a:xfrm>
-              <a:off x="7673007" y="1299888"/>
-              <a:ext cx="2001674" cy="1440000"/>
-            </a:xfrm>
-            <a:prstGeom prst="rect">
-              <a:avLst/>
-            </a:prstGeom>
-          </p:spPr>
-          <p:style>
-            <a:lnRef idx="2">
-              <a:schemeClr val="dk1"/>
-            </a:lnRef>
-            <a:fillRef idx="1">
-              <a:schemeClr val="lt1"/>
-            </a:fillRef>
-            <a:effectRef idx="0">
-              <a:schemeClr val="dk1"/>
-            </a:effectRef>
-            <a:fontRef idx="minor">
-              <a:schemeClr val="dk1"/>
-            </a:fontRef>
-          </p:style>
-          <p:txBody>
-            <a:bodyPr rtlCol="0" anchor="ctr"/>
-            <a:lstStyle/>
-            <a:p>
-              <a:pPr algn="ctr"/>
-              <a:r>
-                <a:rPr lang="de-DE" dirty="0"/>
-                <a:t>Identity Management System</a:t>
-              </a:r>
-            </a:p>
-            <a:p>
-              <a:pPr algn="ctr"/>
-              <a:r>
-                <a:rPr lang="de-DE" dirty="0"/>
-                <a:t>(</a:t>
-              </a:r>
-              <a:r>
-                <a:rPr lang="de-DE" dirty="0" err="1"/>
-                <a:t>Sortinghat</a:t>
-              </a:r>
-              <a:r>
-                <a:rPr lang="de-DE" dirty="0"/>
-                <a:t>)</a:t>
-              </a:r>
-            </a:p>
-          </p:txBody>
-        </p:sp>
-        <p:cxnSp>
-          <p:nvCxnSpPr>
-            <p:cNvPr id="10" name="Gerader Verbinder 9">
-              <a:extLst>
-                <a:ext uri="{FF2B5EF4-FFF2-40B4-BE49-F238E27FC236}">
-                  <a16:creationId xmlns:a16="http://schemas.microsoft.com/office/drawing/2014/main" id="{9983F88E-5427-7AE7-C1FA-B91313DB57DA}"/>
-                </a:ext>
-              </a:extLst>
-            </p:cNvPr>
-            <p:cNvCxnSpPr>
-              <a:stCxn id="6" idx="3"/>
-              <a:endCxn id="8" idx="1"/>
-            </p:cNvCxnSpPr>
-            <p:nvPr/>
-          </p:nvCxnSpPr>
-          <p:spPr>
-            <a:xfrm>
-              <a:off x="6589289" y="2019888"/>
-              <a:ext cx="1083718" cy="0"/>
-            </a:xfrm>
-            <a:prstGeom prst="line">
-              <a:avLst/>
-            </a:prstGeom>
-            <a:ln>
-              <a:headEnd type="arrow" w="med" len="med"/>
-              <a:tailEnd type="arrow" w="med" len="med"/>
-            </a:ln>
-          </p:spPr>
-          <p:style>
-            <a:lnRef idx="2">
-              <a:schemeClr val="dk1"/>
-            </a:lnRef>
-            <a:fillRef idx="0">
-              <a:schemeClr val="dk1"/>
-            </a:fillRef>
-            <a:effectRef idx="1">
-              <a:schemeClr val="dk1"/>
-            </a:effectRef>
-            <a:fontRef idx="minor">
-              <a:schemeClr val="tx1"/>
-            </a:fontRef>
-          </p:style>
-        </p:cxnSp>
-        <p:cxnSp>
-          <p:nvCxnSpPr>
-            <p:cNvPr id="11" name="Gerader Verbinder 10">
-              <a:extLst>
-                <a:ext uri="{FF2B5EF4-FFF2-40B4-BE49-F238E27FC236}">
-                  <a16:creationId xmlns:a16="http://schemas.microsoft.com/office/drawing/2014/main" id="{AE25ADC1-A121-3C34-06E8-9A8763A33DB7}"/>
-                </a:ext>
-              </a:extLst>
-            </p:cNvPr>
-            <p:cNvCxnSpPr>
-              <a:cxnSpLocks/>
-              <a:stCxn id="4" idx="3"/>
-              <a:endCxn id="6" idx="1"/>
-            </p:cNvCxnSpPr>
-            <p:nvPr/>
-          </p:nvCxnSpPr>
-          <p:spPr>
-            <a:xfrm>
-              <a:off x="3459415" y="2019888"/>
-              <a:ext cx="1083718" cy="0"/>
-            </a:xfrm>
-            <a:prstGeom prst="line">
-              <a:avLst/>
-            </a:prstGeom>
-            <a:ln>
-              <a:headEnd type="arrow" w="med" len="med"/>
-              <a:tailEnd type="arrow" w="med" len="med"/>
-            </a:ln>
-          </p:spPr>
-          <p:style>
-            <a:lnRef idx="2">
-              <a:schemeClr val="dk1"/>
-            </a:lnRef>
-            <a:fillRef idx="0">
-              <a:schemeClr val="dk1"/>
-            </a:fillRef>
-            <a:effectRef idx="1">
-              <a:schemeClr val="dk1"/>
-            </a:effectRef>
-            <a:fontRef idx="minor">
-              <a:schemeClr val="tx1"/>
-            </a:fontRef>
-          </p:style>
-        </p:cxnSp>
-        <p:sp>
-          <p:nvSpPr>
-            <p:cNvPr id="20" name="Textfeld 19">
-              <a:extLst>
-                <a:ext uri="{FF2B5EF4-FFF2-40B4-BE49-F238E27FC236}">
-                  <a16:creationId xmlns:a16="http://schemas.microsoft.com/office/drawing/2014/main" id="{6B949113-B4CD-BA19-367F-80FCFEEF5FD7}"/>
-                </a:ext>
-              </a:extLst>
-            </p:cNvPr>
-            <p:cNvSpPr txBox="1"/>
-            <p:nvPr/>
-          </p:nvSpPr>
-          <p:spPr>
-            <a:xfrm>
-              <a:off x="3545336" y="1659888"/>
-              <a:ext cx="889633" cy="360000"/>
-            </a:xfrm>
-            <a:prstGeom prst="rect">
-              <a:avLst/>
-            </a:prstGeom>
-            <a:noFill/>
-          </p:spPr>
-          <p:txBody>
-            <a:bodyPr wrap="square" rtlCol="0">
-              <a:spAutoFit/>
-            </a:bodyPr>
-            <a:lstStyle/>
-            <a:p>
-              <a:pPr algn="ctr"/>
-              <a:r>
-                <a:rPr lang="de-DE" dirty="0"/>
-                <a:t>HTTP</a:t>
-              </a:r>
-            </a:p>
-          </p:txBody>
-        </p:sp>
-        <p:sp>
-          <p:nvSpPr>
-            <p:cNvPr id="22" name="Textfeld 21">
-              <a:extLst>
-                <a:ext uri="{FF2B5EF4-FFF2-40B4-BE49-F238E27FC236}">
-                  <a16:creationId xmlns:a16="http://schemas.microsoft.com/office/drawing/2014/main" id="{C8E7506E-3392-8EC8-326D-6D619AD948E3}"/>
-                </a:ext>
-              </a:extLst>
-            </p:cNvPr>
-            <p:cNvSpPr txBox="1"/>
-            <p:nvPr/>
-          </p:nvSpPr>
-          <p:spPr>
-            <a:xfrm>
-              <a:off x="6675210" y="1659888"/>
-              <a:ext cx="889633" cy="360000"/>
-            </a:xfrm>
-            <a:prstGeom prst="rect">
-              <a:avLst/>
-            </a:prstGeom>
-            <a:noFill/>
-          </p:spPr>
-          <p:txBody>
-            <a:bodyPr wrap="square" rtlCol="0">
-              <a:spAutoFit/>
-            </a:bodyPr>
-            <a:lstStyle/>
-            <a:p>
-              <a:pPr algn="ctr"/>
-              <a:r>
-                <a:rPr lang="de-DE" dirty="0"/>
-                <a:t>HTTP</a:t>
-              </a:r>
-            </a:p>
-          </p:txBody>
-        </p:sp>
+        </p:pic>
       </p:grpSp>
     </p:spTree>
     <p:extLst>
@@ -3698,10 +3781,1065 @@
           <a:chExt cx="0" cy="0"/>
         </a:xfrm>
       </p:grpSpPr>
+      <p:grpSp>
+        <p:nvGrpSpPr>
+          <p:cNvPr id="75" name="Gruppieren 74">
+            <a:extLst>
+              <a:ext uri="{FF2B5EF4-FFF2-40B4-BE49-F238E27FC236}">
+                <a16:creationId xmlns:a16="http://schemas.microsoft.com/office/drawing/2014/main" id="{6EB53A52-C66B-73FC-E1CE-F99BED7BD236}"/>
+              </a:ext>
+            </a:extLst>
+          </p:cNvPr>
+          <p:cNvGrpSpPr/>
+          <p:nvPr/>
+        </p:nvGrpSpPr>
+        <p:grpSpPr>
+          <a:xfrm>
+            <a:off x="95062" y="1771982"/>
+            <a:ext cx="11998561" cy="3646023"/>
+            <a:chOff x="95062" y="1771982"/>
+            <a:chExt cx="11998561" cy="3646023"/>
+          </a:xfrm>
+        </p:grpSpPr>
+        <p:sp>
+          <p:nvSpPr>
+            <p:cNvPr id="3" name="Rechteck: abgerundete Ecken 2">
+              <a:extLst>
+                <a:ext uri="{FF2B5EF4-FFF2-40B4-BE49-F238E27FC236}">
+                  <a16:creationId xmlns:a16="http://schemas.microsoft.com/office/drawing/2014/main" id="{D0E38102-CFBD-B072-983D-0D7ECE354001}"/>
+                </a:ext>
+              </a:extLst>
+            </p:cNvPr>
+            <p:cNvSpPr/>
+            <p:nvPr/>
+          </p:nvSpPr>
+          <p:spPr>
+            <a:xfrm>
+              <a:off x="95062" y="2961000"/>
+              <a:ext cx="1800000" cy="936000"/>
+            </a:xfrm>
+            <a:prstGeom prst="roundRect">
+              <a:avLst/>
+            </a:prstGeom>
+          </p:spPr>
+          <p:style>
+            <a:lnRef idx="2">
+              <a:schemeClr val="dk1"/>
+            </a:lnRef>
+            <a:fillRef idx="1">
+              <a:schemeClr val="lt1"/>
+            </a:fillRef>
+            <a:effectRef idx="0">
+              <a:schemeClr val="dk1"/>
+            </a:effectRef>
+            <a:fontRef idx="minor">
+              <a:schemeClr val="dk1"/>
+            </a:fontRef>
+          </p:style>
+          <p:txBody>
+            <a:bodyPr rtlCol="0" anchor="ctr"/>
+            <a:lstStyle/>
+            <a:p>
+              <a:pPr algn="ctr"/>
+              <a:r>
+                <a:rPr lang="de-DE" dirty="0" err="1"/>
+                <a:t>incoming</a:t>
+              </a:r>
+              <a:r>
+                <a:rPr lang="de-DE" dirty="0"/>
+                <a:t> </a:t>
+              </a:r>
+              <a:r>
+                <a:rPr lang="de-DE" dirty="0" err="1"/>
+                <a:t>request</a:t>
+              </a:r>
+              <a:endParaRPr lang="de-DE" dirty="0"/>
+            </a:p>
+          </p:txBody>
+        </p:sp>
+        <p:sp>
+          <p:nvSpPr>
+            <p:cNvPr id="5" name="Rechteck: abgerundete Ecken 4">
+              <a:extLst>
+                <a:ext uri="{FF2B5EF4-FFF2-40B4-BE49-F238E27FC236}">
+                  <a16:creationId xmlns:a16="http://schemas.microsoft.com/office/drawing/2014/main" id="{1480ACE1-7919-2746-5889-4D556ACD2B4F}"/>
+                </a:ext>
+              </a:extLst>
+            </p:cNvPr>
+            <p:cNvSpPr/>
+            <p:nvPr/>
+          </p:nvSpPr>
+          <p:spPr>
+            <a:xfrm>
+              <a:off x="3773558" y="1771982"/>
+              <a:ext cx="1800000" cy="936000"/>
+            </a:xfrm>
+            <a:prstGeom prst="roundRect">
+              <a:avLst/>
+            </a:prstGeom>
+          </p:spPr>
+          <p:style>
+            <a:lnRef idx="2">
+              <a:schemeClr val="dk1"/>
+            </a:lnRef>
+            <a:fillRef idx="1">
+              <a:schemeClr val="lt1"/>
+            </a:fillRef>
+            <a:effectRef idx="0">
+              <a:schemeClr val="dk1"/>
+            </a:effectRef>
+            <a:fontRef idx="minor">
+              <a:schemeClr val="dk1"/>
+            </a:fontRef>
+          </p:style>
+          <p:txBody>
+            <a:bodyPr rtlCol="0" anchor="ctr"/>
+            <a:lstStyle/>
+            <a:p>
+              <a:pPr algn="ctr"/>
+              <a:r>
+                <a:rPr lang="de-DE" dirty="0"/>
+                <a:t>send ping</a:t>
+              </a:r>
+            </a:p>
+          </p:txBody>
+        </p:sp>
+        <p:sp>
+          <p:nvSpPr>
+            <p:cNvPr id="7" name="Rechteck: abgerundete Ecken 6">
+              <a:extLst>
+                <a:ext uri="{FF2B5EF4-FFF2-40B4-BE49-F238E27FC236}">
+                  <a16:creationId xmlns:a16="http://schemas.microsoft.com/office/drawing/2014/main" id="{2D965880-D524-55B5-92E1-3EC86798C095}"/>
+                </a:ext>
+              </a:extLst>
+            </p:cNvPr>
+            <p:cNvSpPr/>
+            <p:nvPr/>
+          </p:nvSpPr>
+          <p:spPr>
+            <a:xfrm>
+              <a:off x="3770243" y="4150018"/>
+              <a:ext cx="1800000" cy="936000"/>
+            </a:xfrm>
+            <a:prstGeom prst="roundRect">
+              <a:avLst/>
+            </a:prstGeom>
+          </p:spPr>
+          <p:style>
+            <a:lnRef idx="2">
+              <a:schemeClr val="dk1"/>
+            </a:lnRef>
+            <a:fillRef idx="1">
+              <a:schemeClr val="lt1"/>
+            </a:fillRef>
+            <a:effectRef idx="0">
+              <a:schemeClr val="dk1"/>
+            </a:effectRef>
+            <a:fontRef idx="minor">
+              <a:schemeClr val="dk1"/>
+            </a:fontRef>
+          </p:style>
+          <p:txBody>
+            <a:bodyPr rtlCol="0" anchor="ctr"/>
+            <a:lstStyle/>
+            <a:p>
+              <a:pPr algn="ctr"/>
+              <a:r>
+                <a:rPr lang="de-DE" dirty="0" err="1"/>
+                <a:t>forward</a:t>
+              </a:r>
+              <a:r>
+                <a:rPr lang="de-DE" dirty="0"/>
+                <a:t> </a:t>
+              </a:r>
+              <a:r>
+                <a:rPr lang="de-DE" dirty="0" err="1"/>
+                <a:t>request</a:t>
+              </a:r>
+              <a:r>
+                <a:rPr lang="de-DE" dirty="0"/>
+                <a:t> </a:t>
+              </a:r>
+              <a:r>
+                <a:rPr lang="de-DE" dirty="0" err="1"/>
+                <a:t>to</a:t>
+              </a:r>
+              <a:r>
+                <a:rPr lang="de-DE" dirty="0"/>
+                <a:t> </a:t>
+              </a:r>
+              <a:r>
+                <a:rPr lang="de-DE" dirty="0" err="1"/>
+                <a:t>SortingHat</a:t>
+              </a:r>
+              <a:endParaRPr lang="de-DE" dirty="0"/>
+            </a:p>
+          </p:txBody>
+        </p:sp>
+        <p:sp>
+          <p:nvSpPr>
+            <p:cNvPr id="9" name="Rechteck: abgerundete Ecken 8">
+              <a:extLst>
+                <a:ext uri="{FF2B5EF4-FFF2-40B4-BE49-F238E27FC236}">
+                  <a16:creationId xmlns:a16="http://schemas.microsoft.com/office/drawing/2014/main" id="{F8CF42B7-621F-9637-A7EF-4F8FD73EEE20}"/>
+                </a:ext>
+              </a:extLst>
+            </p:cNvPr>
+            <p:cNvSpPr/>
+            <p:nvPr/>
+          </p:nvSpPr>
+          <p:spPr>
+            <a:xfrm>
+              <a:off x="3773558" y="2961000"/>
+              <a:ext cx="1800000" cy="936000"/>
+            </a:xfrm>
+            <a:prstGeom prst="roundRect">
+              <a:avLst/>
+            </a:prstGeom>
+          </p:spPr>
+          <p:style>
+            <a:lnRef idx="2">
+              <a:schemeClr val="dk1"/>
+            </a:lnRef>
+            <a:fillRef idx="1">
+              <a:schemeClr val="lt1"/>
+            </a:fillRef>
+            <a:effectRef idx="0">
+              <a:schemeClr val="dk1"/>
+            </a:effectRef>
+            <a:fontRef idx="minor">
+              <a:schemeClr val="dk1"/>
+            </a:fontRef>
+          </p:style>
+          <p:txBody>
+            <a:bodyPr rtlCol="0" anchor="ctr"/>
+            <a:lstStyle/>
+            <a:p>
+              <a:pPr algn="ctr"/>
+              <a:r>
+                <a:rPr lang="de-DE" dirty="0" err="1"/>
+                <a:t>convert</a:t>
+              </a:r>
+              <a:r>
+                <a:rPr lang="de-DE" dirty="0"/>
+                <a:t> JSON </a:t>
+              </a:r>
+              <a:r>
+                <a:rPr lang="de-DE" dirty="0" err="1"/>
+                <a:t>body</a:t>
+              </a:r>
+              <a:r>
+                <a:rPr lang="de-DE" dirty="0"/>
+                <a:t> </a:t>
+              </a:r>
+              <a:r>
+                <a:rPr lang="de-DE" dirty="0" err="1"/>
+                <a:t>to</a:t>
+              </a:r>
+              <a:r>
+                <a:rPr lang="de-DE" dirty="0"/>
+                <a:t> </a:t>
+              </a:r>
+              <a:r>
+                <a:rPr lang="de-DE" dirty="0" err="1"/>
+                <a:t>DataFrame</a:t>
+              </a:r>
+              <a:endParaRPr lang="de-DE" dirty="0"/>
+            </a:p>
+          </p:txBody>
+        </p:sp>
+        <p:sp>
+          <p:nvSpPr>
+            <p:cNvPr id="11" name="Rechteck: abgerundete Ecken 10">
+              <a:extLst>
+                <a:ext uri="{FF2B5EF4-FFF2-40B4-BE49-F238E27FC236}">
+                  <a16:creationId xmlns:a16="http://schemas.microsoft.com/office/drawing/2014/main" id="{A57D0EB5-A83C-43AD-DD05-1B87DC2F5154}"/>
+                </a:ext>
+              </a:extLst>
+            </p:cNvPr>
+            <p:cNvSpPr/>
+            <p:nvPr/>
+          </p:nvSpPr>
+          <p:spPr>
+            <a:xfrm>
+              <a:off x="5946913" y="2961000"/>
+              <a:ext cx="1800000" cy="936000"/>
+            </a:xfrm>
+            <a:prstGeom prst="roundRect">
+              <a:avLst/>
+            </a:prstGeom>
+          </p:spPr>
+          <p:style>
+            <a:lnRef idx="2">
+              <a:schemeClr val="dk1"/>
+            </a:lnRef>
+            <a:fillRef idx="1">
+              <a:schemeClr val="lt1"/>
+            </a:fillRef>
+            <a:effectRef idx="0">
+              <a:schemeClr val="dk1"/>
+            </a:effectRef>
+            <a:fontRef idx="minor">
+              <a:schemeClr val="dk1"/>
+            </a:fontRef>
+          </p:style>
+          <p:txBody>
+            <a:bodyPr rtlCol="0" anchor="ctr"/>
+            <a:lstStyle/>
+            <a:p>
+              <a:pPr algn="ctr"/>
+              <a:r>
+                <a:rPr lang="de-DE" dirty="0" err="1"/>
+                <a:t>anonymizer</a:t>
+              </a:r>
+              <a:endParaRPr lang="de-DE" dirty="0"/>
+            </a:p>
+            <a:p>
+              <a:pPr algn="ctr"/>
+              <a:r>
+                <a:rPr lang="de-DE" dirty="0" err="1"/>
+                <a:t>processes</a:t>
+              </a:r>
+              <a:r>
+                <a:rPr lang="de-DE" dirty="0"/>
+                <a:t> </a:t>
+              </a:r>
+              <a:r>
+                <a:rPr lang="de-DE" dirty="0" err="1"/>
+                <a:t>data</a:t>
+              </a:r>
+              <a:endParaRPr lang="de-DE" dirty="0"/>
+            </a:p>
+          </p:txBody>
+        </p:sp>
+        <p:sp>
+          <p:nvSpPr>
+            <p:cNvPr id="13" name="Rechteck: abgerundete Ecken 12">
+              <a:extLst>
+                <a:ext uri="{FF2B5EF4-FFF2-40B4-BE49-F238E27FC236}">
+                  <a16:creationId xmlns:a16="http://schemas.microsoft.com/office/drawing/2014/main" id="{A0522D8D-37C4-4AAE-0533-BED21EF7968C}"/>
+                </a:ext>
+              </a:extLst>
+            </p:cNvPr>
+            <p:cNvSpPr/>
+            <p:nvPr/>
+          </p:nvSpPr>
+          <p:spPr>
+            <a:xfrm>
+              <a:off x="8120268" y="2961000"/>
+              <a:ext cx="1800000" cy="936000"/>
+            </a:xfrm>
+            <a:prstGeom prst="roundRect">
+              <a:avLst/>
+            </a:prstGeom>
+          </p:spPr>
+          <p:style>
+            <a:lnRef idx="2">
+              <a:schemeClr val="dk1"/>
+            </a:lnRef>
+            <a:fillRef idx="1">
+              <a:schemeClr val="lt1"/>
+            </a:fillRef>
+            <a:effectRef idx="0">
+              <a:schemeClr val="dk1"/>
+            </a:effectRef>
+            <a:fontRef idx="minor">
+              <a:schemeClr val="dk1"/>
+            </a:fontRef>
+          </p:style>
+          <p:txBody>
+            <a:bodyPr rtlCol="0" anchor="ctr"/>
+            <a:lstStyle/>
+            <a:p>
+              <a:pPr algn="ctr"/>
+              <a:r>
+                <a:rPr lang="de-DE" dirty="0" err="1"/>
+                <a:t>convert</a:t>
+              </a:r>
+              <a:r>
+                <a:rPr lang="de-DE" dirty="0"/>
+                <a:t> </a:t>
+              </a:r>
+              <a:r>
+                <a:rPr lang="de-DE" dirty="0" err="1"/>
+                <a:t>DataFrame</a:t>
+              </a:r>
+              <a:r>
+                <a:rPr lang="de-DE" dirty="0"/>
+                <a:t>  </a:t>
+              </a:r>
+              <a:r>
+                <a:rPr lang="de-DE" dirty="0" err="1"/>
+                <a:t>to</a:t>
+              </a:r>
+              <a:r>
+                <a:rPr lang="de-DE" dirty="0"/>
+                <a:t> JSON </a:t>
+              </a:r>
+              <a:r>
+                <a:rPr lang="de-DE" dirty="0" err="1"/>
+                <a:t>body</a:t>
+              </a:r>
+              <a:endParaRPr lang="de-DE" dirty="0"/>
+            </a:p>
+          </p:txBody>
+        </p:sp>
+        <p:sp>
+          <p:nvSpPr>
+            <p:cNvPr id="15" name="Rechteck: abgerundete Ecken 14">
+              <a:extLst>
+                <a:ext uri="{FF2B5EF4-FFF2-40B4-BE49-F238E27FC236}">
+                  <a16:creationId xmlns:a16="http://schemas.microsoft.com/office/drawing/2014/main" id="{6E71DF65-E742-6B9E-96D9-0BABD4E97470}"/>
+                </a:ext>
+              </a:extLst>
+            </p:cNvPr>
+            <p:cNvSpPr/>
+            <p:nvPr/>
+          </p:nvSpPr>
+          <p:spPr>
+            <a:xfrm>
+              <a:off x="5946913" y="4150018"/>
+              <a:ext cx="1800000" cy="936000"/>
+            </a:xfrm>
+            <a:prstGeom prst="roundRect">
+              <a:avLst/>
+            </a:prstGeom>
+          </p:spPr>
+          <p:style>
+            <a:lnRef idx="2">
+              <a:schemeClr val="dk1"/>
+            </a:lnRef>
+            <a:fillRef idx="1">
+              <a:schemeClr val="lt1"/>
+            </a:fillRef>
+            <a:effectRef idx="0">
+              <a:schemeClr val="dk1"/>
+            </a:effectRef>
+            <a:fontRef idx="minor">
+              <a:schemeClr val="dk1"/>
+            </a:fontRef>
+          </p:style>
+          <p:txBody>
+            <a:bodyPr rtlCol="0" anchor="ctr"/>
+            <a:lstStyle/>
+            <a:p>
+              <a:pPr algn="ctr"/>
+              <a:r>
+                <a:rPr lang="de-DE" dirty="0" err="1"/>
+                <a:t>forward</a:t>
+              </a:r>
+              <a:r>
+                <a:rPr lang="de-DE" dirty="0"/>
+                <a:t> </a:t>
+              </a:r>
+              <a:r>
+                <a:rPr lang="de-DE" dirty="0" err="1"/>
+                <a:t>response</a:t>
+              </a:r>
+              <a:r>
+                <a:rPr lang="de-DE" dirty="0"/>
+                <a:t> </a:t>
+              </a:r>
+              <a:r>
+                <a:rPr lang="de-DE" dirty="0" err="1"/>
+                <a:t>from</a:t>
+              </a:r>
+              <a:r>
+                <a:rPr lang="de-DE" dirty="0"/>
+                <a:t> </a:t>
+              </a:r>
+              <a:r>
+                <a:rPr lang="de-DE" dirty="0" err="1"/>
+                <a:t>Sortinghat</a:t>
+              </a:r>
+              <a:endParaRPr lang="de-DE" dirty="0"/>
+            </a:p>
+          </p:txBody>
+        </p:sp>
+        <p:sp>
+          <p:nvSpPr>
+            <p:cNvPr id="17" name="Rechteck: abgerundete Ecken 16">
+              <a:extLst>
+                <a:ext uri="{FF2B5EF4-FFF2-40B4-BE49-F238E27FC236}">
+                  <a16:creationId xmlns:a16="http://schemas.microsoft.com/office/drawing/2014/main" id="{3ABA7621-4F88-E67E-D2C1-294233C42C68}"/>
+                </a:ext>
+              </a:extLst>
+            </p:cNvPr>
+            <p:cNvSpPr/>
+            <p:nvPr/>
+          </p:nvSpPr>
+          <p:spPr>
+            <a:xfrm>
+              <a:off x="10293623" y="2961000"/>
+              <a:ext cx="1800000" cy="936000"/>
+            </a:xfrm>
+            <a:prstGeom prst="roundRect">
+              <a:avLst/>
+            </a:prstGeom>
+          </p:spPr>
+          <p:style>
+            <a:lnRef idx="2">
+              <a:schemeClr val="dk1"/>
+            </a:lnRef>
+            <a:fillRef idx="1">
+              <a:schemeClr val="lt1"/>
+            </a:fillRef>
+            <a:effectRef idx="0">
+              <a:schemeClr val="dk1"/>
+            </a:effectRef>
+            <a:fontRef idx="minor">
+              <a:schemeClr val="dk1"/>
+            </a:fontRef>
+          </p:style>
+          <p:txBody>
+            <a:bodyPr rtlCol="0" anchor="ctr"/>
+            <a:lstStyle/>
+            <a:p>
+              <a:pPr algn="ctr"/>
+              <a:r>
+                <a:rPr lang="de-DE" dirty="0"/>
+                <a:t>send </a:t>
+              </a:r>
+              <a:r>
+                <a:rPr lang="de-DE" dirty="0" err="1"/>
+                <a:t>response</a:t>
+              </a:r>
+              <a:endParaRPr lang="de-DE" dirty="0"/>
+            </a:p>
+          </p:txBody>
+        </p:sp>
+        <p:cxnSp>
+          <p:nvCxnSpPr>
+            <p:cNvPr id="20" name="Gerade Verbindung mit Pfeil 19">
+              <a:extLst>
+                <a:ext uri="{FF2B5EF4-FFF2-40B4-BE49-F238E27FC236}">
+                  <a16:creationId xmlns:a16="http://schemas.microsoft.com/office/drawing/2014/main" id="{965EE46F-CC1A-9FBB-E016-C3EF2CC58706}"/>
+                </a:ext>
+              </a:extLst>
+            </p:cNvPr>
+            <p:cNvCxnSpPr>
+              <a:cxnSpLocks/>
+              <a:stCxn id="3" idx="3"/>
+              <a:endCxn id="5" idx="1"/>
+            </p:cNvCxnSpPr>
+            <p:nvPr/>
+          </p:nvCxnSpPr>
+          <p:spPr>
+            <a:xfrm flipV="1">
+              <a:off x="1895062" y="2239982"/>
+              <a:ext cx="1878496" cy="1189018"/>
+            </a:xfrm>
+            <a:prstGeom prst="straightConnector1">
+              <a:avLst/>
+            </a:prstGeom>
+            <a:ln>
+              <a:tailEnd type="triangle"/>
+            </a:ln>
+          </p:spPr>
+          <p:style>
+            <a:lnRef idx="2">
+              <a:schemeClr val="dk1"/>
+            </a:lnRef>
+            <a:fillRef idx="0">
+              <a:schemeClr val="dk1"/>
+            </a:fillRef>
+            <a:effectRef idx="1">
+              <a:schemeClr val="dk1"/>
+            </a:effectRef>
+            <a:fontRef idx="minor">
+              <a:schemeClr val="tx1"/>
+            </a:fontRef>
+          </p:style>
+        </p:cxnSp>
+        <p:cxnSp>
+          <p:nvCxnSpPr>
+            <p:cNvPr id="23" name="Gerade Verbindung mit Pfeil 22">
+              <a:extLst>
+                <a:ext uri="{FF2B5EF4-FFF2-40B4-BE49-F238E27FC236}">
+                  <a16:creationId xmlns:a16="http://schemas.microsoft.com/office/drawing/2014/main" id="{325E9D16-6225-2478-16EB-9F0C8D2D96CA}"/>
+                </a:ext>
+              </a:extLst>
+            </p:cNvPr>
+            <p:cNvCxnSpPr>
+              <a:cxnSpLocks/>
+              <a:stCxn id="3" idx="3"/>
+              <a:endCxn id="7" idx="1"/>
+            </p:cNvCxnSpPr>
+            <p:nvPr/>
+          </p:nvCxnSpPr>
+          <p:spPr>
+            <a:xfrm>
+              <a:off x="1895062" y="3429000"/>
+              <a:ext cx="1875181" cy="1189018"/>
+            </a:xfrm>
+            <a:prstGeom prst="straightConnector1">
+              <a:avLst/>
+            </a:prstGeom>
+            <a:ln>
+              <a:tailEnd type="triangle"/>
+            </a:ln>
+          </p:spPr>
+          <p:style>
+            <a:lnRef idx="2">
+              <a:schemeClr val="dk1"/>
+            </a:lnRef>
+            <a:fillRef idx="0">
+              <a:schemeClr val="dk1"/>
+            </a:fillRef>
+            <a:effectRef idx="1">
+              <a:schemeClr val="dk1"/>
+            </a:effectRef>
+            <a:fontRef idx="minor">
+              <a:schemeClr val="tx1"/>
+            </a:fontRef>
+          </p:style>
+        </p:cxnSp>
+        <p:cxnSp>
+          <p:nvCxnSpPr>
+            <p:cNvPr id="26" name="Gerade Verbindung mit Pfeil 25">
+              <a:extLst>
+                <a:ext uri="{FF2B5EF4-FFF2-40B4-BE49-F238E27FC236}">
+                  <a16:creationId xmlns:a16="http://schemas.microsoft.com/office/drawing/2014/main" id="{DF515DE5-58E6-0706-9491-8329308A3F0B}"/>
+                </a:ext>
+              </a:extLst>
+            </p:cNvPr>
+            <p:cNvCxnSpPr>
+              <a:cxnSpLocks/>
+              <a:stCxn id="3" idx="3"/>
+              <a:endCxn id="9" idx="1"/>
+            </p:cNvCxnSpPr>
+            <p:nvPr/>
+          </p:nvCxnSpPr>
+          <p:spPr>
+            <a:xfrm>
+              <a:off x="1895062" y="3429000"/>
+              <a:ext cx="1878496" cy="0"/>
+            </a:xfrm>
+            <a:prstGeom prst="straightConnector1">
+              <a:avLst/>
+            </a:prstGeom>
+            <a:ln>
+              <a:tailEnd type="triangle"/>
+            </a:ln>
+          </p:spPr>
+          <p:style>
+            <a:lnRef idx="2">
+              <a:schemeClr val="dk1"/>
+            </a:lnRef>
+            <a:fillRef idx="0">
+              <a:schemeClr val="dk1"/>
+            </a:fillRef>
+            <a:effectRef idx="1">
+              <a:schemeClr val="dk1"/>
+            </a:effectRef>
+            <a:fontRef idx="minor">
+              <a:schemeClr val="tx1"/>
+            </a:fontRef>
+          </p:style>
+        </p:cxnSp>
+        <p:cxnSp>
+          <p:nvCxnSpPr>
+            <p:cNvPr id="29" name="Gerade Verbindung mit Pfeil 28">
+              <a:extLst>
+                <a:ext uri="{FF2B5EF4-FFF2-40B4-BE49-F238E27FC236}">
+                  <a16:creationId xmlns:a16="http://schemas.microsoft.com/office/drawing/2014/main" id="{B7CA8782-8055-4FF0-32E7-BDFF5A2FA5D1}"/>
+                </a:ext>
+              </a:extLst>
+            </p:cNvPr>
+            <p:cNvCxnSpPr>
+              <a:cxnSpLocks/>
+              <a:stCxn id="7" idx="3"/>
+              <a:endCxn id="15" idx="1"/>
+            </p:cNvCxnSpPr>
+            <p:nvPr/>
+          </p:nvCxnSpPr>
+          <p:spPr>
+            <a:xfrm>
+              <a:off x="5570243" y="4618018"/>
+              <a:ext cx="376670" cy="0"/>
+            </a:xfrm>
+            <a:prstGeom prst="straightConnector1">
+              <a:avLst/>
+            </a:prstGeom>
+            <a:ln>
+              <a:tailEnd type="triangle"/>
+            </a:ln>
+          </p:spPr>
+          <p:style>
+            <a:lnRef idx="2">
+              <a:schemeClr val="dk1"/>
+            </a:lnRef>
+            <a:fillRef idx="0">
+              <a:schemeClr val="dk1"/>
+            </a:fillRef>
+            <a:effectRef idx="1">
+              <a:schemeClr val="dk1"/>
+            </a:effectRef>
+            <a:fontRef idx="minor">
+              <a:schemeClr val="tx1"/>
+            </a:fontRef>
+          </p:style>
+        </p:cxnSp>
+        <p:cxnSp>
+          <p:nvCxnSpPr>
+            <p:cNvPr id="32" name="Gerade Verbindung mit Pfeil 31">
+              <a:extLst>
+                <a:ext uri="{FF2B5EF4-FFF2-40B4-BE49-F238E27FC236}">
+                  <a16:creationId xmlns:a16="http://schemas.microsoft.com/office/drawing/2014/main" id="{EB3757E6-9639-9B18-A4F6-7C1AA7339E74}"/>
+                </a:ext>
+              </a:extLst>
+            </p:cNvPr>
+            <p:cNvCxnSpPr>
+              <a:cxnSpLocks/>
+              <a:stCxn id="9" idx="3"/>
+              <a:endCxn id="11" idx="1"/>
+            </p:cNvCxnSpPr>
+            <p:nvPr/>
+          </p:nvCxnSpPr>
+          <p:spPr>
+            <a:xfrm>
+              <a:off x="5573558" y="3429000"/>
+              <a:ext cx="373355" cy="0"/>
+            </a:xfrm>
+            <a:prstGeom prst="straightConnector1">
+              <a:avLst/>
+            </a:prstGeom>
+            <a:ln>
+              <a:tailEnd type="triangle"/>
+            </a:ln>
+          </p:spPr>
+          <p:style>
+            <a:lnRef idx="2">
+              <a:schemeClr val="dk1"/>
+            </a:lnRef>
+            <a:fillRef idx="0">
+              <a:schemeClr val="dk1"/>
+            </a:fillRef>
+            <a:effectRef idx="1">
+              <a:schemeClr val="dk1"/>
+            </a:effectRef>
+            <a:fontRef idx="minor">
+              <a:schemeClr val="tx1"/>
+            </a:fontRef>
+          </p:style>
+        </p:cxnSp>
+        <p:cxnSp>
+          <p:nvCxnSpPr>
+            <p:cNvPr id="35" name="Gerade Verbindung mit Pfeil 34">
+              <a:extLst>
+                <a:ext uri="{FF2B5EF4-FFF2-40B4-BE49-F238E27FC236}">
+                  <a16:creationId xmlns:a16="http://schemas.microsoft.com/office/drawing/2014/main" id="{7CFEFF6A-74E5-0868-D6A6-DA8ADB615FAB}"/>
+                </a:ext>
+              </a:extLst>
+            </p:cNvPr>
+            <p:cNvCxnSpPr>
+              <a:cxnSpLocks/>
+              <a:stCxn id="11" idx="3"/>
+              <a:endCxn id="13" idx="1"/>
+            </p:cNvCxnSpPr>
+            <p:nvPr/>
+          </p:nvCxnSpPr>
+          <p:spPr>
+            <a:xfrm>
+              <a:off x="7746913" y="3429000"/>
+              <a:ext cx="373355" cy="0"/>
+            </a:xfrm>
+            <a:prstGeom prst="straightConnector1">
+              <a:avLst/>
+            </a:prstGeom>
+            <a:ln>
+              <a:tailEnd type="triangle"/>
+            </a:ln>
+          </p:spPr>
+          <p:style>
+            <a:lnRef idx="2">
+              <a:schemeClr val="dk1"/>
+            </a:lnRef>
+            <a:fillRef idx="0">
+              <a:schemeClr val="dk1"/>
+            </a:fillRef>
+            <a:effectRef idx="1">
+              <a:schemeClr val="dk1"/>
+            </a:effectRef>
+            <a:fontRef idx="minor">
+              <a:schemeClr val="tx1"/>
+            </a:fontRef>
+          </p:style>
+        </p:cxnSp>
+        <p:cxnSp>
+          <p:nvCxnSpPr>
+            <p:cNvPr id="38" name="Gerade Verbindung mit Pfeil 37">
+              <a:extLst>
+                <a:ext uri="{FF2B5EF4-FFF2-40B4-BE49-F238E27FC236}">
+                  <a16:creationId xmlns:a16="http://schemas.microsoft.com/office/drawing/2014/main" id="{36DFDBCB-3852-A714-161A-F7A40A10E2D7}"/>
+                </a:ext>
+              </a:extLst>
+            </p:cNvPr>
+            <p:cNvCxnSpPr>
+              <a:cxnSpLocks/>
+              <a:stCxn id="13" idx="3"/>
+              <a:endCxn id="17" idx="1"/>
+            </p:cNvCxnSpPr>
+            <p:nvPr/>
+          </p:nvCxnSpPr>
+          <p:spPr>
+            <a:xfrm>
+              <a:off x="9920268" y="3429000"/>
+              <a:ext cx="373355" cy="0"/>
+            </a:xfrm>
+            <a:prstGeom prst="straightConnector1">
+              <a:avLst/>
+            </a:prstGeom>
+            <a:ln>
+              <a:tailEnd type="triangle"/>
+            </a:ln>
+          </p:spPr>
+          <p:style>
+            <a:lnRef idx="2">
+              <a:schemeClr val="dk1"/>
+            </a:lnRef>
+            <a:fillRef idx="0">
+              <a:schemeClr val="dk1"/>
+            </a:fillRef>
+            <a:effectRef idx="1">
+              <a:schemeClr val="dk1"/>
+            </a:effectRef>
+            <a:fontRef idx="minor">
+              <a:schemeClr val="tx1"/>
+            </a:fontRef>
+          </p:style>
+        </p:cxnSp>
+        <p:sp>
+          <p:nvSpPr>
+            <p:cNvPr id="64" name="Textfeld 63">
+              <a:extLst>
+                <a:ext uri="{FF2B5EF4-FFF2-40B4-BE49-F238E27FC236}">
+                  <a16:creationId xmlns:a16="http://schemas.microsoft.com/office/drawing/2014/main" id="{89252B9C-2A7A-F779-791C-58206EEC48BF}"/>
+                </a:ext>
+              </a:extLst>
+            </p:cNvPr>
+            <p:cNvSpPr txBox="1"/>
+            <p:nvPr/>
+          </p:nvSpPr>
+          <p:spPr>
+            <a:xfrm>
+              <a:off x="1306487" y="1861828"/>
+              <a:ext cx="2393420" cy="523220"/>
+            </a:xfrm>
+            <a:prstGeom prst="rect">
+              <a:avLst/>
+            </a:prstGeom>
+            <a:noFill/>
+          </p:spPr>
+          <p:txBody>
+            <a:bodyPr wrap="square" rtlCol="0">
+              <a:spAutoFit/>
+            </a:bodyPr>
+            <a:lstStyle/>
+            <a:p>
+              <a:pPr algn="r"/>
+              <a:r>
+                <a:rPr lang="de-DE" sz="1400" dirty="0" err="1">
+                  <a:latin typeface="Aptos Display" panose="020B0004020202020204" pitchFamily="34" charset="0"/>
+                </a:rPr>
+                <a:t>docker-compose-healthcheck</a:t>
+              </a:r>
+              <a:endParaRPr lang="de-DE" sz="1400" dirty="0">
+                <a:latin typeface="Aptos Display" panose="020B0004020202020204" pitchFamily="34" charset="0"/>
+              </a:endParaRPr>
+            </a:p>
+            <a:p>
+              <a:pPr algn="r"/>
+              <a:r>
+                <a:rPr lang="de-DE" sz="1400" dirty="0">
+                  <a:latin typeface="Aptos Display" panose="020B0004020202020204" pitchFamily="34" charset="0"/>
+                </a:rPr>
+                <a:t>ping </a:t>
+              </a:r>
+            </a:p>
+          </p:txBody>
+        </p:sp>
+        <p:sp>
+          <p:nvSpPr>
+            <p:cNvPr id="66" name="Textfeld 65">
+              <a:extLst>
+                <a:ext uri="{FF2B5EF4-FFF2-40B4-BE49-F238E27FC236}">
+                  <a16:creationId xmlns:a16="http://schemas.microsoft.com/office/drawing/2014/main" id="{53CCC7A3-0E92-BA68-39D6-63D939F5DE62}"/>
+                </a:ext>
+              </a:extLst>
+            </p:cNvPr>
+            <p:cNvSpPr txBox="1"/>
+            <p:nvPr/>
+          </p:nvSpPr>
+          <p:spPr>
+            <a:xfrm>
+              <a:off x="1448693" y="4463898"/>
+              <a:ext cx="2251214" cy="954107"/>
+            </a:xfrm>
+            <a:prstGeom prst="rect">
+              <a:avLst/>
+            </a:prstGeom>
+            <a:noFill/>
+          </p:spPr>
+          <p:txBody>
+            <a:bodyPr wrap="square" rtlCol="0">
+              <a:spAutoFit/>
+            </a:bodyPr>
+            <a:lstStyle/>
+            <a:p>
+              <a:pPr algn="r"/>
+              <a:r>
+                <a:rPr lang="de-DE" sz="1400" dirty="0" err="1">
+                  <a:latin typeface="Aptos Display" panose="020B0004020202020204" pitchFamily="34" charset="0"/>
+                </a:rPr>
+                <a:t>show</a:t>
+              </a:r>
+              <a:endParaRPr lang="de-DE" sz="1400" dirty="0">
+                <a:latin typeface="Aptos Display" panose="020B0004020202020204" pitchFamily="34" charset="0"/>
+              </a:endParaRPr>
+            </a:p>
+            <a:p>
+              <a:pPr algn="r"/>
+              <a:r>
+                <a:rPr lang="de-DE" sz="1400" dirty="0">
+                  <a:latin typeface="Aptos Display" panose="020B0004020202020204" pitchFamily="34" charset="0"/>
+                </a:rPr>
+                <a:t>show-profile</a:t>
+              </a:r>
+            </a:p>
+            <a:p>
+              <a:pPr algn="r"/>
+              <a:r>
+                <a:rPr lang="de-DE" sz="1400" dirty="0">
+                  <a:latin typeface="Aptos Display" panose="020B0004020202020204" pitchFamily="34" charset="0"/>
+                </a:rPr>
+                <a:t>find-profile</a:t>
+              </a:r>
+            </a:p>
+            <a:p>
+              <a:pPr algn="r"/>
+              <a:r>
+                <a:rPr lang="de-DE" sz="1400" dirty="0">
+                  <a:latin typeface="Aptos Display" panose="020B0004020202020204" pitchFamily="34" charset="0"/>
+                </a:rPr>
+                <a:t>find-</a:t>
+              </a:r>
+              <a:r>
+                <a:rPr lang="de-DE" sz="1400" dirty="0" err="1">
+                  <a:latin typeface="Aptos Display" panose="020B0004020202020204" pitchFamily="34" charset="0"/>
+                </a:rPr>
+                <a:t>profiles</a:t>
+              </a:r>
+              <a:r>
+                <a:rPr lang="de-DE" sz="1400" dirty="0">
+                  <a:latin typeface="Aptos Display" panose="020B0004020202020204" pitchFamily="34" charset="0"/>
+                </a:rPr>
+                <a:t>-</a:t>
+              </a:r>
+              <a:r>
+                <a:rPr lang="de-DE" sz="1400" dirty="0" err="1">
+                  <a:latin typeface="Aptos Display" panose="020B0004020202020204" pitchFamily="34" charset="0"/>
+                </a:rPr>
+                <a:t>by-organization</a:t>
+              </a:r>
+              <a:endParaRPr lang="de-DE" sz="1400" dirty="0">
+                <a:latin typeface="Aptos Display" panose="020B0004020202020204" pitchFamily="34" charset="0"/>
+              </a:endParaRPr>
+            </a:p>
+          </p:txBody>
+        </p:sp>
+        <p:sp>
+          <p:nvSpPr>
+            <p:cNvPr id="71" name="Textfeld 70">
+              <a:extLst>
+                <a:ext uri="{FF2B5EF4-FFF2-40B4-BE49-F238E27FC236}">
+                  <a16:creationId xmlns:a16="http://schemas.microsoft.com/office/drawing/2014/main" id="{0AADA5A7-6698-62F8-F19F-F33F587A90C9}"/>
+                </a:ext>
+              </a:extLst>
+            </p:cNvPr>
+            <p:cNvSpPr txBox="1"/>
+            <p:nvPr/>
+          </p:nvSpPr>
+          <p:spPr>
+            <a:xfrm>
+              <a:off x="2093843" y="3167389"/>
+              <a:ext cx="1606064" cy="523220"/>
+            </a:xfrm>
+            <a:prstGeom prst="rect">
+              <a:avLst/>
+            </a:prstGeom>
+            <a:noFill/>
+          </p:spPr>
+          <p:txBody>
+            <a:bodyPr wrap="square" rtlCol="0">
+              <a:spAutoFit/>
+            </a:bodyPr>
+            <a:lstStyle/>
+            <a:p>
+              <a:pPr algn="r"/>
+              <a:r>
+                <a:rPr lang="de-DE" sz="1400" dirty="0" err="1"/>
+                <a:t>change_identities</a:t>
+              </a:r>
+              <a:endParaRPr lang="de-DE" sz="1400" dirty="0"/>
+            </a:p>
+            <a:p>
+              <a:pPr algn="r"/>
+              <a:r>
+                <a:rPr lang="de-DE" sz="1400" dirty="0" err="1"/>
+                <a:t>update_identities</a:t>
+              </a:r>
+              <a:r>
+                <a:rPr lang="de-DE" sz="1400" dirty="0"/>
+                <a:t> </a:t>
+              </a:r>
+              <a:endParaRPr lang="de-DE" sz="1400" dirty="0">
+                <a:latin typeface="Aptos Display" panose="020B0004020202020204" pitchFamily="34" charset="0"/>
+              </a:endParaRPr>
+            </a:p>
+          </p:txBody>
+        </p:sp>
+      </p:grpSp>
     </p:spTree>
     <p:extLst>
       <p:ext uri="{BB962C8B-B14F-4D97-AF65-F5344CB8AC3E}">
         <p14:creationId xmlns:p14="http://schemas.microsoft.com/office/powerpoint/2010/main" val="3395883092"/>
+      </p:ext>
+    </p:extLst>
+  </p:cSld>
+  <p:clrMapOvr>
+    <a:masterClrMapping/>
+  </p:clrMapOvr>
+</p:sld>
+</file>
+
+<file path=ppt/slides/slide3.xml><?xml version="1.0" encoding="utf-8"?>
+<p:sld xmlns:a="http://schemas.openxmlformats.org/drawingml/2006/main" xmlns:r="http://schemas.openxmlformats.org/officeDocument/2006/relationships" xmlns:p="http://schemas.openxmlformats.org/presentationml/2006/main">
+  <p:cSld>
+    <p:spTree>
+      <p:nvGrpSpPr>
+        <p:cNvPr id="1" name="">
+          <a:extLst>
+            <a:ext uri="{FF2B5EF4-FFF2-40B4-BE49-F238E27FC236}">
+              <a16:creationId xmlns:a16="http://schemas.microsoft.com/office/drawing/2014/main" id="{B855DB7F-9E8C-C79D-670C-81ACB1ABDB34}"/>
+            </a:ext>
+          </a:extLst>
+        </p:cNvPr>
+        <p:cNvGrpSpPr/>
+        <p:nvPr/>
+      </p:nvGrpSpPr>
+      <p:grpSpPr>
+        <a:xfrm>
+          <a:off x="0" y="0"/>
+          <a:ext cx="0" cy="0"/>
+          <a:chOff x="0" y="0"/>
+          <a:chExt cx="0" cy="0"/>
+        </a:xfrm>
+      </p:grpSpPr>
+    </p:spTree>
+    <p:extLst>
+      <p:ext uri="{BB962C8B-B14F-4D97-AF65-F5344CB8AC3E}">
+        <p14:creationId xmlns:p14="http://schemas.microsoft.com/office/powerpoint/2010/main" val="766187680"/>
       </p:ext>
     </p:extLst>
   </p:cSld>
